--- a/templates/未命名.pptx
+++ b/templates/未命名.pptx
@@ -3088,6 +3088,41 @@
         <p:nvPr/>
       </p:nvGrpSpPr>
       <p:grpSpPr/>
+      <p:sp>
+        <p:nvSpPr>
+          <p:cNvPr id="2" name="TextBox 1"/>
+          <p:cNvSpPr txBox="1"/>
+          <p:nvPr/>
+        </p:nvSpPr>
+        <p:spPr>
+          <a:xfrm>
+            <a:off x="3840480" y="2834640"/>
+            <a:ext cx="5120640" cy="731520"/>
+          </a:xfrm>
+          <a:prstGeom prst="rect">
+            <a:avLst/>
+          </a:prstGeom>
+          <a:noFill/>
+        </p:spPr>
+        <p:txBody>
+          <a:bodyPr wrap="none">
+            <a:spAutoFit/>
+          </a:bodyPr>
+          <a:lstStyle/>
+          <a:p>
+            <a:pPr>
+              <a:defRPr sz="2400">
+                <a:solidFill>
+                  <a:srgbClr val="B0B0B0"/>
+                </a:solidFill>
+              </a:defRPr>
+            </a:pPr>
+            <a:r>
+              <a:t>未命名演示文稿</a:t>
+            </a:r>
+          </a:p>
+        </p:txBody>
+      </p:sp>
     </p:spTree>
   </p:cSld>
   <p:clrMapOvr>

--- a/templates/未命名.pptx
+++ b/templates/未命名.pptx
@@ -4,9 +4,6 @@
   <p:sldMasterIdLst>
     <p:sldMasterId id="2147483648" r:id="rId1"/>
   </p:sldMasterIdLst>
-  <p:sldIdLst>
-    <p:sldId id="256" r:id="rId7"/>
-  </p:sldIdLst>
   <p:sldSz cx="9144000" cy="6858000" type="screen4x3"/>
   <p:notesSz cx="6858000" cy="9144000"/>
   <p:defaultTextStyle>
@@ -3076,59 +3073,6 @@
     </p:otherStyle>
   </p:txStyles>
 </p:sldMaster>
-</file>
-
-<file path=ppt/slides/slide1.xml><?xml version="1.0" encoding="utf-8"?>
-<p:sld xmlns:a="http://schemas.openxmlformats.org/drawingml/2006/main" xmlns:p="http://schemas.openxmlformats.org/presentationml/2006/main" xmlns:r="http://schemas.openxmlformats.org/officeDocument/2006/relationships">
-  <p:cSld>
-    <p:spTree>
-      <p:nvGrpSpPr>
-        <p:cNvPr id="1" name=""/>
-        <p:cNvGrpSpPr/>
-        <p:nvPr/>
-      </p:nvGrpSpPr>
-      <p:grpSpPr/>
-      <p:sp>
-        <p:nvSpPr>
-          <p:cNvPr id="2" name="TextBox 1"/>
-          <p:cNvSpPr txBox="1"/>
-          <p:nvPr/>
-        </p:nvSpPr>
-        <p:spPr>
-          <a:xfrm>
-            <a:off x="3840480" y="2834640"/>
-            <a:ext cx="5120640" cy="731520"/>
-          </a:xfrm>
-          <a:prstGeom prst="rect">
-            <a:avLst/>
-          </a:prstGeom>
-          <a:noFill/>
-        </p:spPr>
-        <p:txBody>
-          <a:bodyPr wrap="none">
-            <a:spAutoFit/>
-          </a:bodyPr>
-          <a:lstStyle/>
-          <a:p>
-            <a:pPr>
-              <a:defRPr sz="2400">
-                <a:solidFill>
-                  <a:srgbClr val="B0B0B0"/>
-                </a:solidFill>
-              </a:defRPr>
-            </a:pPr>
-            <a:r>
-              <a:t>未命名演示文稿</a:t>
-            </a:r>
-          </a:p>
-        </p:txBody>
-      </p:sp>
-    </p:spTree>
-  </p:cSld>
-  <p:clrMapOvr>
-    <a:masterClrMapping/>
-  </p:clrMapOvr>
-</p:sld>
 </file>
 
 <file path=ppt/theme/theme1.xml><?xml version="1.0" encoding="utf-8"?>
